--- a/docs/presentation/slides-hyunji.pptx
+++ b/docs/presentation/slides-hyunji.pptx
@@ -722,12 +722,12 @@
           </a:p>
           <a:p>
             <a:r>
-              <a:t>중지 반응은 sim 에서만 쟀고, 반영 지연은 최대 312 ms 로 미달입니다. 탐색 시간은 438 s 로 목표의 3.7 배입니다. 실기 연속 성공 횟수는 기록이 없어 미확인으로 두었습니다.</a:t>
-            </a:r>
-          </a:p>
-          <a:p>
-            <a:r>
-              <a:t>(출처: TR-01_20260923(PR #181) · TR-05_20260922 · #180 · PR #179. 확인 필요: 연속 성공 회차 기록이 있으면 병후에게)</a:t>
+              <a:t>중지 반응은 sim 에서만 쟀고, 반영 지연은 최대 312 ms 로 미달입니다. 탐색 시간은 438 s 로 목표의 3.6 배인데, 힘 제어로 연속해서 미는 방식이 실기에서 실패해 멈춰서 힘을 읽는 스텝 모드로 바꾼 대가입니다. 120 s 는 연속 밀기를 전제로 잡은 숫자였습니다. 실기 연속 성공 횟수는 기록이 없어 미확인으로 두었습니다.</a:t>
+            </a:r>
+          </a:p>
+          <a:p>
+            <a:r>
+              <a:t>(출처: TR-01_20260923(PR #181) · TR-05_20260922 · #180 학민 정정(9/23) · 병후 정리(9/25) · PR #179. 확인 필요: 연속 성공 회차 기록이 있으면 병후에게)</a:t>
             </a:r>
           </a:p>
         </p:txBody>
@@ -797,7 +797,7 @@
           <a:lstStyle/>
           <a:p>
             <a:r>
-              <a:t>왜 미달이 났는지 순서대로 말씀드리겠습니다. 처음에는 KPI 를 한 번 성공하는 것으로 읽었고, 회차 기준과 시간 기준을 늦게 챙겼습니다. 9/21 에 움직이는 중의 힘으로는 모서리를 한 번도 못 잡아서, 멈춰서 힘을 읽는 스텝 모드로 바꾸며 정확도를 먼저 잡았습니다. 그 결과 치수는 목표 안에 들어왔지만 탐색 시간은 438 s 가 되었고, 위 그래프처럼 그중 76 % 가 스텝 긁기입니다.</a:t>
+              <a:t>왜 미달이 났는지 순서대로 말씀드리겠습니다. 처음에는 KPI 를 한 번 성공하는 것으로 읽었고, 회차 기준과 시간 기준을 늦게 챙겼습니다. 9/21~22 실기에서 힘 제어로 연속해서 미는 방식이 실패했습니다 — 방향마다 실제 누름이 1.5 에서 8.6 N 까지 흩어지고, 방향을 바꾼 뒤 떠서 모서리를 놓치고, 가짜 EDGE 가 났습니다. 그래서 한 스텝 가고 멈춰서 힘을 읽는 스텝 모드로 바꾸며 정확도를 먼저 잡았습니다. 그 결과 치수는 목표 안에 들어왔지만 탐색 시간은 438 s 가 되었고, 위 그래프처럼 그중 76 % 가 스텝 긁기입니다. 120 s 는 연속 밀기를 전제로 잡은 숫자였습니다.</a:t>
             </a:r>
           </a:p>
           <a:p>
@@ -807,7 +807,12 @@
           </a:p>
           <a:p>
             <a:r>
-              <a:t>개선안은 스텝 크기와 속도를 조정해 긁는 시간을 줄이는 것, 임계를 내리되 공중 거짓 접촉을 같이 고치는 것, 반영 지연을 토픽별로 다시 재는 것입니다.</a:t>
+              <a:t>개선안은 계산값이고 아직 해 보지 않았습니다. 재접근 내림을 빠른 45 mm 와 저속 5 mm 로 나누면 세 번에 약 60 초, 거친 스텝을 1 mm 로 올리면 약 150 초가 줄어 230 초 정도가 됩니다. 정확도는 다듬기 스텝 0.1 mm 가 정하므로 영향이 없습니다. 그 아래는 스텝마다 멈춰서 힘을 세 번 읽는 비용이라 방식의 한계이고, 그래서 120 초는 스텝 모드 기준으로 다시 잡아야 한다는 것을 숨기지 않고 말씀드립니다.</a:t>
+            </a:r>
+          </a:p>
+          <a:p>
+            <a:r>
+              <a:t>(출처: #180 본문 · 학민 정정 9/23 · 병후 정리 9/25. 병후 정리의 200 s 는 재접근 4 회 기준이고 실측은 3 회라 230 s 로 적었다)</a:t>
             </a:r>
           </a:p>
         </p:txBody>
@@ -7678,7 +7683,7 @@
                           </a:solidFill>
                           <a:latin typeface="맑은 고딕"/>
                         </a:rPr>
-                        <a:t>임계 2 N 검토 — 공중 거짓 접촉(#182)과 같이</a:t>
+                        <a:t>임계 2 N 검토 — 하강 거짓 접촉 3/10(#182, settle 구간 6 N 판정 문제)과 같이</a:t>
                       </a:r>
                     </a:p>
                   </a:txBody>
@@ -8014,7 +8019,7 @@
                           </a:solidFill>
                           <a:latin typeface="맑은 고딕"/>
                         </a:rPr>
-                        <a:t>438 s — 9/23 실기, 스텝 긁기 331 s · 재접근 내림 100 s</a:t>
+                        <a:t>438 s — 9/23 실기(scan …3702): 스텝 긁기 331 s(76 %) · 재접근 내림 3 회 76 s · 나머지 35 s(#180)</a:t>
                       </a:r>
                     </a:p>
                   </a:txBody>
@@ -8058,7 +8063,7 @@
                           </a:solidFill>
                           <a:latin typeface="맑은 고딕"/>
                         </a:rPr>
-                        <a:t>정확도를 위해 멈춰서 읽는 스텝 모드</a:t>
+                        <a:t>연속 밀기가 실기에서 실패 → 멈춰서 읽는 스텝 모드(#160). 120 s 는 연속 밀기 전제</a:t>
                       </a:r>
                     </a:p>
                   </a:txBody>
@@ -8080,7 +8085,7 @@
                           </a:solidFill>
                           <a:latin typeface="맑은 고딕"/>
                         </a:rPr>
-                        <a:t>스텝 크기 · 속도 조정(#180)</a:t>
+                        <a:t>재접근 2 단 −60 · 거친 스텝 1.0 mm −150 → 약 230 s(계산값 · 미실시). 120 s 는 KPI 재설정(9/25)</a:t>
                       </a:r>
                     </a:p>
                   </a:txBody>
@@ -8282,7 +8287,7 @@
                           </a:solidFill>
                           <a:latin typeface="맑은 고딕"/>
                         </a:rPr>
-                        <a:t>미실시 (같은 점 10 회 z 산포 0.040 mm 는 다른 양)</a:t>
+                        <a:t>미실시 (같은 점 10 회 z 산포 0.040 mm 는 접촉 재현성 — 치수 반복성이 아니다)</a:t>
                       </a:r>
                     </a:p>
                   </a:txBody>
@@ -9121,7 +9126,7 @@
                   </a:solidFill>
                   <a:latin typeface="+mn-ea"/>
                 </a:rPr>
-                <a:t>⑥ 미달을 어떻게 읽나 — 정확도를 먼저 잡고, 시간을 내줬다</a:t>
+                <a:t>⑥ 미달을 어떻게 읽나 — 정밀도를 택해 시간 KPI 를 놓쳤다 → 원인 · 개선안 · KPI 재설정</a:t>
               </a:r>
             </a:p>
           </p:txBody>
@@ -9360,7 +9365,7 @@
         <p:spPr>
           <a:xfrm>
             <a:off x="457200" y="2212848"/>
-            <a:ext cx="6583680" cy="1426464"/>
+            <a:ext cx="6583680" cy="1755648"/>
           </a:xfrm>
           <a:prstGeom prst="rect">
             <a:avLst/>
@@ -9383,7 +9388,7 @@
         </p:blipFill>
         <p:spPr>
           <a:xfrm>
-            <a:off x="457200" y="3730752"/>
+            <a:off x="457200" y="4041648"/>
             <a:ext cx="6583680" cy="2523744"/>
           </a:xfrm>
           <a:prstGeom prst="rect">
@@ -9500,7 +9505,7 @@
                 </a:solidFill>
                 <a:latin typeface="맑은 고딕"/>
               </a:rPr>
-              <a:t>9/21 움직이는 중의 힘으로는 모서리 0/4 → 멈춰서 읽는 스텝 모드로 정확도 우선(9/22)</a:t>
+              <a:t>9/21~22 힘 제어 연속 밀기가 실기에서 실패(방향별 누름 1.5~8.6 N 편차 · 방향 전환 뒤 뜸 · 가짜 EDGE, #152~#155) → 멈춰서 힘을 읽는 스텝 모드(#160)로 정확도 우선</a:t>
             </a:r>
           </a:p>
         </p:txBody>
@@ -9557,7 +9562,7 @@
                 </a:solidFill>
                 <a:latin typeface="맑은 고딕"/>
               </a:rPr>
-              <a:t>치수 ±3 mm 달성. 대신 탐색 438 s — 시간의 76 % 가 스텝 긁기</a:t>
+              <a:t>치수 +1.50 / −0.36 / +0.26 mm 로 ±3 mm 달성. 대신 탐색 438 s(KPI 의 3.6 배) — 76 % 가 스텝 긁기. 120 s 는 연속 밀기를 전제로 잡은 숫자</a:t>
             </a:r>
           </a:p>
         </p:txBody>
@@ -9655,7 +9660,7 @@
                 </a:solidFill>
                 <a:latin typeface="맑은 고딕"/>
               </a:rPr>
-              <a:t>⑤ 개선안</a:t>
+              <a:t>⑤ 개선안 · KPI</a:t>
             </a:r>
           </a:p>
           <a:p>
@@ -9671,7 +9676,7 @@
                 </a:solidFill>
                 <a:latin typeface="맑은 고딕"/>
               </a:rPr>
-              <a:t>스텝 크기 · 속도 조정으로 긁기 시간 줄이기(#180) · 임계 2 N + 공중 거짓 접촉 수정(#182) · 반영 지연 토픽별 재시험</a:t>
+              <a:t>재접근 2 단(−60 s) · 거친 스텝 0.5 → 1.0 mm(−150 s, 분해능은 다듬기 0.1 mm 가 정함) → 약 230 s, 계산값 · 미실시. 그 아래는 스텝당 비용의 한계 → 120 s 는 스텝 모드 기준으로 KPI 재설정(팀 결정 9/25)</a:t>
             </a:r>
           </a:p>
         </p:txBody>

--- a/docs/presentation/slides-hyunji.pptx
+++ b/docs/presentation/slides-hyunji.pptx
@@ -722,12 +722,12 @@
           </a:p>
           <a:p>
             <a:r>
-              <a:t>중지 반응은 sim 에서만 쟀고, 반영 지연은 최대 312 ms 로 미달입니다. 탐색 시간은 438 s 로 목표의 3.6 배인데, 힘 제어로 연속해서 미는 방식이 실기에서 실패해 멈춰서 힘을 읽는 스텝 모드로 바꾼 대가입니다. 120 s 는 연속 밀기를 전제로 잡은 숫자였습니다. 실기 연속 성공 횟수는 기록이 없어 미확인으로 두었습니다.</a:t>
-            </a:r>
-          </a:p>
-          <a:p>
-            <a:r>
-              <a:t>(출처: TR-01_20260923(PR #181) · TR-05_20260922 · #180 학민 정정(9/23) · 병후 정리(9/25) · PR #179. 확인 필요: 연속 성공 회차 기록이 있으면 병후에게)</a:t>
+              <a:t>중지 반응은 sim 에서만 쟀고, 반영 지연은 최대 312 ms 로 미달입니다. 탐색 시간은 438 s 로 목표의 3.6 배인데, 힘 제어로 연속해서 미는 방식이 실기에서 실패해 멈춰서 힘을 읽는 스텝 모드로 바꾼 대가입니다. 120 s 는 연속 밀기를 전제로 잡은 숫자였습니다. 실기 종단은 9/23 시연에서 세 번 연속 성공했지만, 9/29 같은 배치로 다시 한 스캔은 세 번 모두 한 방향에서 접촉을 유지하지 못해 원인을 찾고 있습니다. 그래서 9/29 용접은 9/23 스캔 결과로 했습니다.</a:t>
+            </a:r>
+          </a:p>
+          <a:p>
+            <a:r>
+              <a:t>(출처: TR-01_20260923(PR #181) · TR-05_20260922 · #180 학민 정정(9/23) · 병후 정리(9/25) · PR #179. 9/29 재시험은 realrobot-session_20260929.md 5 절)</a:t>
             </a:r>
           </a:p>
         </p:txBody>
@@ -8153,7 +8153,7 @@
                           </a:solidFill>
                           <a:latin typeface="맑은 고딕"/>
                         </a:rPr>
-                        <a:t>웹 START → 형상 → 웹 표시 종단 성공 — 9/23(PR #179). 연속 회차 기록은 없다</a:t>
+                        <a:t>웹 START → 형상 → 웹 표시 종단 3 회 연속 — 9/23 시연(팀원 4 명 입회 · 영상). 9/29 같은 배치 재시험 3 회는 한 방향(NEG_Y) 실패</a:t>
                       </a:r>
                     </a:p>
                   </a:txBody>
@@ -8171,11 +8171,11 @@
                       <a:r>
                         <a:rPr sz="950" b="1">
                           <a:solidFill>
-                            <a:srgbClr val="7F7F7F"/>
+                            <a:srgbClr val="3378C8"/>
                           </a:solidFill>
                           <a:latin typeface="맑은 고딕"/>
                         </a:rPr>
-                        <a:t>미확인</a:t>
+                        <a:t>달성 (9/23)</a:t>
                       </a:r>
                     </a:p>
                   </a:txBody>
@@ -8197,7 +8197,7 @@
                           </a:solidFill>
                           <a:latin typeface="맑은 고딕"/>
                         </a:rPr>
-                        <a:t>—</a:t>
+                        <a:t>9/29: 윗면 중심 −y 3~5 mm 에서 접촉 유지 실패(원인 조사 중)</a:t>
                       </a:r>
                     </a:p>
                   </a:txBody>
@@ -8219,7 +8219,7 @@
                           </a:solidFill>
                           <a:latin typeface="맑은 고딕"/>
                         </a:rPr>
-                        <a:t>리허설에서 연속 회차 기록</a:t>
+                        <a:t>원인 조사 뒤 연속 회차 재시험</a:t>
                       </a:r>
                     </a:p>
                   </a:txBody>
